--- a/system-design-101/vi/lessons/sd-02-026/slides/sd-02-026.pptx
+++ b/system-design-101/vi/lessons/sd-02-026/slides/sd-02-026.pptx
@@ -7979,6 +7979,39 @@
               <a:buNone/>
             </a:pPr>
             <a:r>
+              <a:rPr lang="en-US" sz="2250" dirty="0" spc="-1" kern="0">
+                <a:solidFill>
+                  <a:srgbClr val="C4C8D6"/>
+                </a:solidFill>
+                <a:latin typeface="Be Vietnam Pro" pitchFamily="34" charset="0"/>
+                <a:ea typeface="Be Vietnam Pro" pitchFamily="34" charset="-122"/>
+                <a:cs typeface="Be Vietnam Pro" pitchFamily="34" charset="-120"/>
+              </a:rPr>
+              <a:t>Gợi</a:t>
+            </a:r>
+            <a:r>
+              <a:rPr lang="en-US" sz="2250" dirty="0" spc="2" kern="0">
+                <a:solidFill>
+                  <a:srgbClr val="C4C8D6"/>
+                </a:solidFill>
+                <a:latin typeface="Be Vietnam Pro" pitchFamily="34" charset="0"/>
+                <a:ea typeface="Be Vietnam Pro" pitchFamily="34" charset="-122"/>
+                <a:cs typeface="Be Vietnam Pro" pitchFamily="34" charset="-120"/>
+              </a:rPr>
+              <a:t> ý của</a:t>
+            </a:r>
+            <a:r>
+              <a:rPr lang="en-US" sz="2250" dirty="0" spc="-1" kern="0">
+                <a:solidFill>
+                  <a:srgbClr val="C4C8D6"/>
+                </a:solidFill>
+                <a:latin typeface="Be Vietnam Pro" pitchFamily="34" charset="0"/>
+                <a:ea typeface="Be Vietnam Pro" pitchFamily="34" charset="-122"/>
+                <a:cs typeface="Be Vietnam Pro" pitchFamily="34" charset="-120"/>
+              </a:rPr>
+              <a:t> bài:</a:t>
+            </a:r>
+            <a:r>
               <a:rPr lang="en-US" sz="2250" dirty="0" spc="5" kern="0">
                 <a:solidFill>
                   <a:srgbClr val="C4C8D6"/>
@@ -7987,7 +8020,7 @@
                 <a:ea typeface="Be Vietnam Pro" pitchFamily="34" charset="-122"/>
                 <a:cs typeface="Be Vietnam Pro" pitchFamily="34" charset="-120"/>
               </a:rPr>
-              <a:t>Thường</a:t>
+              <a:t> thường</a:t>
             </a:r>
             <a:r>
               <a:rPr lang="en-US" sz="2250" dirty="0" spc="-13" kern="0">
